--- a/presentation/dataset_cartography_reproduction.pptx
+++ b/presentation/dataset_cartography_reproduction.pptx
@@ -459,7 +459,24 @@
           <a:lstStyle/>
           <a:p>
             <a:r>
-              <a:t>On WinoGrande, the most ambiguous third produced the strongest reported OOD score, 87.6, while retaining much more ID performance than a random third. In SNLI, the ambiguous third was within 0.2 percentage points of full-data ID performance and exceeded full-data Diagnostics accuracy. The paper found related patterns across datasets, but we should state this as empirical evidence for these settings, not a universal rule. On WinoGrande, easy selections underperformed the random subset, while ambiguous and hard selections were competitive or better. For SNLI, the paper reports improvements across the Diagnostics categories, although the aggregate numbers shown here are the comparison we reproduce.</a:t>
+              <a:rPr dirty="0"/>
+              <a:t>On </a:t>
+            </a:r>
+            <a:r>
+              <a:rPr dirty="0" err="1"/>
+              <a:t>WinoGrande</a:t>
+            </a:r>
+            <a:r>
+              <a:rPr dirty="0"/>
+              <a:t>, the most ambiguous third produced the strongest reported OOD score, 87.6, while retaining much more ID performance than a random third. In SNLI, the ambiguous third was within 0.2 percentage points of full-data ID performance and exceeded full-data Diagnostics accuracy. The paper found related patterns across datasets, but we should state this as empirical evidence for these settings, not a universal rule. On </a:t>
+            </a:r>
+            <a:r>
+              <a:rPr dirty="0" err="1"/>
+              <a:t>WinoGrande</a:t>
+            </a:r>
+            <a:r>
+              <a:rPr dirty="0"/>
+              <a:t>, easy selections underperformed the random subset, while ambiguous and hard selections were competitive or better. For SNLI, the paper reports improvements across the Diagnostics categories, although the aggregate numbers shown here are the comparison we reproduce.</a:t>
             </a:r>
           </a:p>
         </p:txBody>
@@ -5193,6 +5210,7 @@
                   <a:srgbClr val="5F6B75"/>
                 </a:solidFill>
                 <a:latin typeface="Aptos"/>
+                <a:hlinkClick r:id="rId3" action="ppaction://hlinkfile"/>
               </a:rPr>
               <a:t>github.com/</a:t>
             </a:r>
@@ -5202,6 +5220,7 @@
                   <a:srgbClr val="5F6B75"/>
                 </a:solidFill>
                 <a:latin typeface="Aptos"/>
+                <a:hlinkClick r:id="rId3" action="ppaction://hlinkfile"/>
               </a:rPr>
               <a:t>JuliaMazine</a:t>
             </a:r>
@@ -5211,9 +5230,16 @@
                   <a:srgbClr val="5F6B75"/>
                 </a:solidFill>
                 <a:latin typeface="Aptos"/>
+                <a:hlinkClick r:id="rId3" action="ppaction://hlinkfile"/>
               </a:rPr>
               <a:t>/dataset-cartography-reproduction</a:t>
             </a:r>
+            <a:endParaRPr sz="1600" b="0" i="0" dirty="0">
+              <a:solidFill>
+                <a:srgbClr val="5F6B75"/>
+              </a:solidFill>
+              <a:latin typeface="Aptos"/>
+            </a:endParaRPr>
           </a:p>
         </p:txBody>
       </p:sp>
@@ -5286,7 +5312,7 @@
           <p:nvPr/>
         </p:nvPicPr>
         <p:blipFill>
-          <a:blip r:embed="rId3">
+          <a:blip r:embed="rId4">
             <a:extLst>
               <a:ext uri="{28A0092B-C50C-407E-A947-70E740481C1C}">
                 <a14:useLocalDpi xmlns:a14="http://schemas.microsoft.com/office/drawing/2010/main" val="0"/>
@@ -6810,11 +6836,17 @@
           <p:cNvGraphicFramePr>
             <a:graphicFrameLocks noGrp="1"/>
           </p:cNvGraphicFramePr>
-          <p:nvPr/>
+          <p:nvPr>
+            <p:extLst>
+              <p:ext uri="{D42A27DB-BD31-4B8C-83A1-F6EECF244321}">
+                <p14:modId xmlns:p14="http://schemas.microsoft.com/office/powerpoint/2010/main" val="1532003352"/>
+              </p:ext>
+            </p:extLst>
+          </p:nvPr>
         </p:nvGraphicFramePr>
         <p:xfrm>
           <a:off x="658368" y="1719072"/>
-          <a:ext cx="5120640" cy="2788920"/>
+          <a:ext cx="5120640" cy="3005330"/>
         </p:xfrm>
         <a:graphic>
           <a:graphicData uri="http://schemas.openxmlformats.org/drawingml/2006/table">
@@ -6845,7 +6877,7 @@
                   </a:extLst>
                 </a:gridCol>
               </a:tblGrid>
-              <a:tr h="557784">
+              <a:tr h="601066">
                 <a:tc>
                   <a:txBody>
                     <a:bodyPr/>
@@ -6921,7 +6953,7 @@
                   </a:ext>
                 </a:extLst>
               </a:tr>
-              <a:tr h="557784">
+              <a:tr h="601066">
                 <a:tc>
                   <a:txBody>
                     <a:bodyPr/>
@@ -6997,7 +7029,7 @@
                   </a:ext>
                 </a:extLst>
               </a:tr>
-              <a:tr h="557784">
+              <a:tr h="601066">
                 <a:tc>
                   <a:txBody>
                     <a:bodyPr/>
@@ -7073,7 +7105,7 @@
                   </a:ext>
                 </a:extLst>
               </a:tr>
-              <a:tr h="557784">
+              <a:tr h="601066">
                 <a:tc>
                   <a:txBody>
                     <a:bodyPr/>
@@ -7149,7 +7181,7 @@
                   </a:ext>
                 </a:extLst>
               </a:tr>
-              <a:tr h="557784">
+              <a:tr h="601066">
                 <a:tc>
                   <a:txBody>
                     <a:bodyPr/>
@@ -7157,7 +7189,7 @@
                     <a:p>
                       <a:pPr algn="l"/>
                       <a:r>
-                        <a:rPr sz="1300" b="0" i="0">
+                        <a:rPr sz="1300" b="0" i="0" dirty="0">
                           <a:solidFill>
                             <a:srgbClr val="202A35"/>
                           </a:solidFill>
@@ -7203,7 +7235,7 @@
                     <a:p>
                       <a:pPr algn="ctr"/>
                       <a:r>
-                        <a:rPr sz="1300" b="0" i="0">
+                        <a:rPr sz="1300" b="0" i="0" dirty="0">
                           <a:solidFill>
                             <a:srgbClr val="697386"/>
                           </a:solidFill>
@@ -7291,8 +7323,8 @@
         </p:nvSpPr>
         <p:spPr>
           <a:xfrm>
-            <a:off x="6291072" y="1719072"/>
-            <a:ext cx="5212080" cy="2788920"/>
+            <a:off x="6291072" y="1719071"/>
+            <a:ext cx="5212080" cy="3005329"/>
           </a:xfrm>
           <a:prstGeom prst="rect">
             <a:avLst/>
@@ -7337,7 +7369,7 @@
         </p:nvSpPr>
         <p:spPr>
           <a:xfrm>
-            <a:off x="6629400" y="2011680"/>
+            <a:off x="6629400" y="1922780"/>
             <a:ext cx="4526280" cy="274320"/>
           </a:xfrm>
           <a:prstGeom prst="rect">
@@ -7391,7 +7423,7 @@
         </p:nvSpPr>
         <p:spPr>
           <a:xfrm>
-            <a:off x="6629400" y="2395728"/>
+            <a:off x="6629400" y="2268728"/>
             <a:ext cx="4526280" cy="502920"/>
           </a:xfrm>
           <a:prstGeom prst="rect">
@@ -7445,7 +7477,7 @@
         </p:nvSpPr>
         <p:spPr>
           <a:xfrm>
-            <a:off x="6629400" y="2980944"/>
+            <a:off x="6629400" y="2841244"/>
             <a:ext cx="4526280" cy="274320"/>
           </a:xfrm>
           <a:prstGeom prst="rect">
@@ -7499,7 +7531,7 @@
         </p:nvSpPr>
         <p:spPr>
           <a:xfrm>
-            <a:off x="6629400" y="3493008"/>
+            <a:off x="6629400" y="3340608"/>
             <a:ext cx="4526280" cy="274320"/>
           </a:xfrm>
           <a:prstGeom prst="rect">
@@ -7553,7 +7585,7 @@
         </p:nvSpPr>
         <p:spPr>
           <a:xfrm>
-            <a:off x="6629400" y="3813048"/>
+            <a:off x="6629400" y="3686048"/>
             <a:ext cx="4526280" cy="502920"/>
           </a:xfrm>
           <a:prstGeom prst="rect">
@@ -7588,7 +7620,7 @@
           <a:p>
             <a:pPr algn="ctr"/>
             <a:r>
-              <a:rPr sz="2800" b="1" i="0">
+              <a:rPr sz="2800" b="1" i="0" dirty="0">
                 <a:solidFill>
                   <a:srgbClr val="697386"/>
                 </a:solidFill>
@@ -7649,6 +7681,93 @@
                 <a:latin typeface="Aptos"/>
               </a:rPr>
               <a:t>Across these experiments, challenging and variable examples could preserve ID accuracy while improving independently collected OOD performance.</a:t>
+            </a:r>
+          </a:p>
+        </p:txBody>
+      </p:sp>
+      <p:sp>
+        <p:nvSpPr>
+          <p:cNvPr id="18" name="Rectangle 12">
+            <a:extLst>
+              <a:ext uri="{FF2B5EF4-FFF2-40B4-BE49-F238E27FC236}">
+                <a16:creationId xmlns:a16="http://schemas.microsoft.com/office/drawing/2014/main" id="{D8DAA810-FD03-5E31-CAD6-F166EBF8114D}"/>
+              </a:ext>
+            </a:extLst>
+          </p:cNvPr>
+          <p:cNvSpPr/>
+          <p:nvPr/>
+        </p:nvSpPr>
+        <p:spPr>
+          <a:xfrm>
+            <a:off x="6629400" y="4245954"/>
+            <a:ext cx="4526280" cy="274320"/>
+          </a:xfrm>
+          <a:prstGeom prst="rect">
+            <a:avLst/>
+          </a:prstGeom>
+          <a:solidFill>
+            <a:srgbClr val="F7F5F0"/>
+          </a:solidFill>
+          <a:ln>
+            <a:solidFill>
+              <a:srgbClr val="F7F5F0"/>
+            </a:solidFill>
+          </a:ln>
+        </p:spPr>
+        <p:style>
+          <a:lnRef idx="1">
+            <a:schemeClr val="accent1"/>
+          </a:lnRef>
+          <a:fillRef idx="3">
+            <a:schemeClr val="accent1"/>
+          </a:fillRef>
+          <a:effectRef idx="2">
+            <a:schemeClr val="accent1"/>
+          </a:effectRef>
+          <a:fontRef idx="minor">
+            <a:schemeClr val="lt1"/>
+          </a:fontRef>
+        </p:style>
+        <p:txBody>
+          <a:bodyPr lIns="36576" tIns="36576" rIns="36576" bIns="36576" rtlCol="0" anchor="t"/>
+          <a:lstStyle/>
+          <a:p>
+            <a:pPr algn="ctr"/>
+            <a:r>
+              <a:rPr lang="en-US" sz="1300" dirty="0">
+                <a:solidFill>
+                  <a:srgbClr val="5F6B75"/>
+                </a:solidFill>
+                <a:latin typeface="Aptos"/>
+              </a:rPr>
+              <a:t>1.7</a:t>
+            </a:r>
+            <a:r>
+              <a:rPr sz="1300" b="0" i="0" dirty="0">
+                <a:solidFill>
+                  <a:srgbClr val="5F6B75"/>
+                </a:solidFill>
+                <a:latin typeface="Aptos"/>
+              </a:rPr>
+              <a:t> pp </a:t>
+            </a:r>
+            <a:r>
+              <a:rPr lang="en-US" sz="1300" b="0" i="0" dirty="0">
+                <a:solidFill>
+                  <a:srgbClr val="5F6B75"/>
+                </a:solidFill>
+                <a:latin typeface="Aptos"/>
+              </a:rPr>
+              <a:t>higher than</a:t>
+            </a:r>
+            <a:r>
+              <a:rPr sz="1300" b="0" i="0" dirty="0">
+                <a:solidFill>
+                  <a:srgbClr val="5F6B75"/>
+                </a:solidFill>
+                <a:latin typeface="Aptos"/>
+              </a:rPr>
+              <a:t> full data</a:t>
             </a:r>
           </a:p>
         </p:txBody>
@@ -10813,7 +10932,7 @@
         <p:spPr>
           <a:xfrm>
             <a:off x="6382512" y="2331720"/>
-            <a:ext cx="4709160" cy="822960"/>
+            <a:ext cx="4937760" cy="822960"/>
           </a:xfrm>
           <a:prstGeom prst="rect">
             <a:avLst/>
@@ -14796,7 +14915,7 @@
         <p:spPr>
           <a:xfrm>
             <a:off x="8001000" y="4892040"/>
-            <a:ext cx="3337560" cy="960120"/>
+            <a:ext cx="3337560" cy="1161288"/>
           </a:xfrm>
           <a:prstGeom prst="rect">
             <a:avLst/>
@@ -14896,7 +15015,7 @@
         <p:spPr>
           <a:xfrm>
             <a:off x="8211312" y="5394960"/>
-            <a:ext cx="2907792" cy="256032"/>
+            <a:ext cx="2907792" cy="438912"/>
           </a:xfrm>
           <a:prstGeom prst="rect">
             <a:avLst/>
@@ -16251,7 +16370,7 @@
         </p:blipFill>
         <p:spPr>
           <a:xfrm>
-            <a:off x="359374" y="1307591"/>
+            <a:off x="640080" y="1307591"/>
             <a:ext cx="3733655" cy="2800241"/>
           </a:xfrm>
           <a:prstGeom prst="rect">
@@ -16275,7 +16394,7 @@
         </p:blipFill>
         <p:spPr>
           <a:xfrm>
-            <a:off x="4818743" y="1307591"/>
+            <a:off x="4971143" y="1316737"/>
             <a:ext cx="2862217" cy="2862217"/>
           </a:xfrm>
           <a:prstGeom prst="rect">
@@ -16299,7 +16418,7 @@
         </p:blipFill>
         <p:spPr>
           <a:xfrm>
-            <a:off x="8275319" y="1307591"/>
+            <a:off x="8366615" y="1344022"/>
             <a:ext cx="2862217" cy="2862217"/>
           </a:xfrm>
           <a:prstGeom prst="rect">
@@ -17131,7 +17250,7 @@
         </p:nvSpPr>
         <p:spPr>
           <a:xfrm>
-            <a:off x="580644" y="1772422"/>
+            <a:off x="1008380" y="1853067"/>
             <a:ext cx="3886200" cy="594360"/>
           </a:xfrm>
           <a:prstGeom prst="rect">
@@ -17185,7 +17304,7 @@
         </p:nvSpPr>
         <p:spPr>
           <a:xfrm>
-            <a:off x="713232" y="3059449"/>
+            <a:off x="1152144" y="3623837"/>
             <a:ext cx="73152" cy="73152"/>
           </a:xfrm>
           <a:prstGeom prst="ellipse">
@@ -17231,7 +17350,7 @@
         </p:nvSpPr>
         <p:spPr>
           <a:xfrm>
-            <a:off x="914400" y="3059449"/>
+            <a:off x="1353312" y="3623837"/>
             <a:ext cx="73152" cy="73152"/>
           </a:xfrm>
           <a:prstGeom prst="ellipse">
@@ -17277,7 +17396,7 @@
         </p:nvSpPr>
         <p:spPr>
           <a:xfrm>
-            <a:off x="1115568" y="3059449"/>
+            <a:off x="1554480" y="3623837"/>
             <a:ext cx="73152" cy="73152"/>
           </a:xfrm>
           <a:prstGeom prst="ellipse">
@@ -17323,7 +17442,7 @@
         </p:nvSpPr>
         <p:spPr>
           <a:xfrm>
-            <a:off x="1316736" y="3059449"/>
+            <a:off x="1755648" y="3623837"/>
             <a:ext cx="73152" cy="73152"/>
           </a:xfrm>
           <a:prstGeom prst="ellipse">
@@ -17369,7 +17488,7 @@
         </p:nvSpPr>
         <p:spPr>
           <a:xfrm>
-            <a:off x="1517904" y="3059449"/>
+            <a:off x="1956816" y="3623837"/>
             <a:ext cx="73152" cy="73152"/>
           </a:xfrm>
           <a:prstGeom prst="ellipse">
@@ -17415,7 +17534,7 @@
         </p:nvSpPr>
         <p:spPr>
           <a:xfrm>
-            <a:off x="1719072" y="3059449"/>
+            <a:off x="2157984" y="3623837"/>
             <a:ext cx="73152" cy="73152"/>
           </a:xfrm>
           <a:prstGeom prst="ellipse">
@@ -17461,7 +17580,7 @@
         </p:nvSpPr>
         <p:spPr>
           <a:xfrm>
-            <a:off x="1920240" y="3059449"/>
+            <a:off x="2359152" y="3623837"/>
             <a:ext cx="73152" cy="73152"/>
           </a:xfrm>
           <a:prstGeom prst="ellipse">
@@ -17507,7 +17626,7 @@
         </p:nvSpPr>
         <p:spPr>
           <a:xfrm>
-            <a:off x="2121408" y="3059449"/>
+            <a:off x="2560320" y="3623837"/>
             <a:ext cx="73152" cy="73152"/>
           </a:xfrm>
           <a:prstGeom prst="ellipse">
@@ -17553,7 +17672,7 @@
         </p:nvSpPr>
         <p:spPr>
           <a:xfrm>
-            <a:off x="2322576" y="3059449"/>
+            <a:off x="2761488" y="3623837"/>
             <a:ext cx="73152" cy="73152"/>
           </a:xfrm>
           <a:prstGeom prst="ellipse">
@@ -17599,7 +17718,7 @@
         </p:nvSpPr>
         <p:spPr>
           <a:xfrm>
-            <a:off x="2523744" y="3059449"/>
+            <a:off x="2962656" y="3623837"/>
             <a:ext cx="73152" cy="73152"/>
           </a:xfrm>
           <a:prstGeom prst="ellipse">
@@ -17645,7 +17764,7 @@
         </p:nvSpPr>
         <p:spPr>
           <a:xfrm>
-            <a:off x="2724912" y="3059449"/>
+            <a:off x="3163824" y="3623837"/>
             <a:ext cx="73152" cy="73152"/>
           </a:xfrm>
           <a:prstGeom prst="ellipse">
@@ -17691,7 +17810,7 @@
         </p:nvSpPr>
         <p:spPr>
           <a:xfrm>
-            <a:off x="2926080" y="3059449"/>
+            <a:off x="3364992" y="3623837"/>
             <a:ext cx="73152" cy="73152"/>
           </a:xfrm>
           <a:prstGeom prst="ellipse">
@@ -17737,7 +17856,7 @@
         </p:nvSpPr>
         <p:spPr>
           <a:xfrm>
-            <a:off x="3127248" y="3059449"/>
+            <a:off x="3566160" y="3623837"/>
             <a:ext cx="73152" cy="73152"/>
           </a:xfrm>
           <a:prstGeom prst="ellipse">
@@ -17783,7 +17902,7 @@
         </p:nvSpPr>
         <p:spPr>
           <a:xfrm>
-            <a:off x="3328415" y="3059449"/>
+            <a:off x="3767327" y="3623837"/>
             <a:ext cx="73152" cy="73152"/>
           </a:xfrm>
           <a:prstGeom prst="ellipse">
@@ -17829,7 +17948,7 @@
         </p:nvSpPr>
         <p:spPr>
           <a:xfrm>
-            <a:off x="3529584" y="3059449"/>
+            <a:off x="3968496" y="3623837"/>
             <a:ext cx="73152" cy="73152"/>
           </a:xfrm>
           <a:prstGeom prst="ellipse">
@@ -17875,7 +17994,7 @@
         </p:nvSpPr>
         <p:spPr>
           <a:xfrm>
-            <a:off x="3730752" y="3059449"/>
+            <a:off x="4169664" y="3623837"/>
             <a:ext cx="73152" cy="73152"/>
           </a:xfrm>
           <a:prstGeom prst="ellipse">
@@ -17921,7 +18040,7 @@
         </p:nvSpPr>
         <p:spPr>
           <a:xfrm>
-            <a:off x="3931920" y="3059449"/>
+            <a:off x="4370832" y="3623837"/>
             <a:ext cx="73152" cy="73152"/>
           </a:xfrm>
           <a:prstGeom prst="ellipse">
@@ -17967,7 +18086,7 @@
         </p:nvSpPr>
         <p:spPr>
           <a:xfrm>
-            <a:off x="4133088" y="3059449"/>
+            <a:off x="4572000" y="3623837"/>
             <a:ext cx="73152" cy="73152"/>
           </a:xfrm>
           <a:prstGeom prst="ellipse">
@@ -18013,7 +18132,7 @@
         </p:nvSpPr>
         <p:spPr>
           <a:xfrm>
-            <a:off x="713232" y="3260617"/>
+            <a:off x="1152144" y="3825005"/>
             <a:ext cx="73152" cy="73152"/>
           </a:xfrm>
           <a:prstGeom prst="ellipse">
@@ -18059,7 +18178,7 @@
         </p:nvSpPr>
         <p:spPr>
           <a:xfrm>
-            <a:off x="914400" y="3260617"/>
+            <a:off x="1353312" y="3825005"/>
             <a:ext cx="73152" cy="73152"/>
           </a:xfrm>
           <a:prstGeom prst="ellipse">
@@ -18105,7 +18224,7 @@
         </p:nvSpPr>
         <p:spPr>
           <a:xfrm>
-            <a:off x="1115568" y="3260617"/>
+            <a:off x="1554480" y="3825005"/>
             <a:ext cx="73152" cy="73152"/>
           </a:xfrm>
           <a:prstGeom prst="ellipse">
@@ -18151,7 +18270,7 @@
         </p:nvSpPr>
         <p:spPr>
           <a:xfrm>
-            <a:off x="1316736" y="3260617"/>
+            <a:off x="1755648" y="3825005"/>
             <a:ext cx="73152" cy="73152"/>
           </a:xfrm>
           <a:prstGeom prst="ellipse">
@@ -18197,7 +18316,7 @@
         </p:nvSpPr>
         <p:spPr>
           <a:xfrm>
-            <a:off x="1517904" y="3260617"/>
+            <a:off x="1956816" y="3825005"/>
             <a:ext cx="73152" cy="73152"/>
           </a:xfrm>
           <a:prstGeom prst="ellipse">
@@ -18243,7 +18362,7 @@
         </p:nvSpPr>
         <p:spPr>
           <a:xfrm>
-            <a:off x="1719072" y="3260617"/>
+            <a:off x="2157984" y="3825005"/>
             <a:ext cx="73152" cy="73152"/>
           </a:xfrm>
           <a:prstGeom prst="ellipse">
@@ -18289,7 +18408,7 @@
         </p:nvSpPr>
         <p:spPr>
           <a:xfrm>
-            <a:off x="1920240" y="3260617"/>
+            <a:off x="2359152" y="3825005"/>
             <a:ext cx="73152" cy="73152"/>
           </a:xfrm>
           <a:prstGeom prst="ellipse">
@@ -18335,7 +18454,7 @@
         </p:nvSpPr>
         <p:spPr>
           <a:xfrm>
-            <a:off x="2121408" y="3260617"/>
+            <a:off x="2560320" y="3825005"/>
             <a:ext cx="73152" cy="73152"/>
           </a:xfrm>
           <a:prstGeom prst="ellipse">
@@ -18381,7 +18500,7 @@
         </p:nvSpPr>
         <p:spPr>
           <a:xfrm>
-            <a:off x="2322576" y="3260617"/>
+            <a:off x="2761488" y="3825005"/>
             <a:ext cx="73152" cy="73152"/>
           </a:xfrm>
           <a:prstGeom prst="ellipse">
@@ -18427,7 +18546,7 @@
         </p:nvSpPr>
         <p:spPr>
           <a:xfrm>
-            <a:off x="2523744" y="3260617"/>
+            <a:off x="2962656" y="3825005"/>
             <a:ext cx="73152" cy="73152"/>
           </a:xfrm>
           <a:prstGeom prst="ellipse">
@@ -18473,7 +18592,7 @@
         </p:nvSpPr>
         <p:spPr>
           <a:xfrm>
-            <a:off x="2724912" y="3260617"/>
+            <a:off x="3163824" y="3825005"/>
             <a:ext cx="73152" cy="73152"/>
           </a:xfrm>
           <a:prstGeom prst="ellipse">
@@ -18519,7 +18638,7 @@
         </p:nvSpPr>
         <p:spPr>
           <a:xfrm>
-            <a:off x="2926080" y="3260617"/>
+            <a:off x="3364992" y="3825005"/>
             <a:ext cx="73152" cy="73152"/>
           </a:xfrm>
           <a:prstGeom prst="ellipse">
@@ -18565,7 +18684,7 @@
         </p:nvSpPr>
         <p:spPr>
           <a:xfrm>
-            <a:off x="3127248" y="3260617"/>
+            <a:off x="3566160" y="3825005"/>
             <a:ext cx="73152" cy="73152"/>
           </a:xfrm>
           <a:prstGeom prst="ellipse">
@@ -18611,7 +18730,7 @@
         </p:nvSpPr>
         <p:spPr>
           <a:xfrm>
-            <a:off x="3328415" y="3260617"/>
+            <a:off x="3767327" y="3825005"/>
             <a:ext cx="73152" cy="73152"/>
           </a:xfrm>
           <a:prstGeom prst="ellipse">
@@ -18657,7 +18776,7 @@
         </p:nvSpPr>
         <p:spPr>
           <a:xfrm>
-            <a:off x="3529584" y="3260617"/>
+            <a:off x="3968496" y="3825005"/>
             <a:ext cx="73152" cy="73152"/>
           </a:xfrm>
           <a:prstGeom prst="ellipse">
@@ -18703,7 +18822,7 @@
         </p:nvSpPr>
         <p:spPr>
           <a:xfrm>
-            <a:off x="3730752" y="3260617"/>
+            <a:off x="4169664" y="3825005"/>
             <a:ext cx="73152" cy="73152"/>
           </a:xfrm>
           <a:prstGeom prst="ellipse">
@@ -18749,7 +18868,7 @@
         </p:nvSpPr>
         <p:spPr>
           <a:xfrm>
-            <a:off x="3931920" y="3260617"/>
+            <a:off x="4370832" y="3825005"/>
             <a:ext cx="73152" cy="73152"/>
           </a:xfrm>
           <a:prstGeom prst="ellipse">
@@ -18795,7 +18914,7 @@
         </p:nvSpPr>
         <p:spPr>
           <a:xfrm>
-            <a:off x="4133088" y="3260617"/>
+            <a:off x="4572000" y="3825005"/>
             <a:ext cx="73152" cy="73152"/>
           </a:xfrm>
           <a:prstGeom prst="ellipse">
@@ -18841,7 +18960,7 @@
         </p:nvSpPr>
         <p:spPr>
           <a:xfrm>
-            <a:off x="713232" y="3461785"/>
+            <a:off x="1152144" y="4026173"/>
             <a:ext cx="73152" cy="73152"/>
           </a:xfrm>
           <a:prstGeom prst="ellipse">
@@ -18887,7 +19006,7 @@
         </p:nvSpPr>
         <p:spPr>
           <a:xfrm>
-            <a:off x="914400" y="3461785"/>
+            <a:off x="1353312" y="4026173"/>
             <a:ext cx="73152" cy="73152"/>
           </a:xfrm>
           <a:prstGeom prst="ellipse">
@@ -18933,7 +19052,7 @@
         </p:nvSpPr>
         <p:spPr>
           <a:xfrm>
-            <a:off x="1115568" y="3461785"/>
+            <a:off x="1554480" y="4026173"/>
             <a:ext cx="73152" cy="73152"/>
           </a:xfrm>
           <a:prstGeom prst="ellipse">
@@ -18979,7 +19098,7 @@
         </p:nvSpPr>
         <p:spPr>
           <a:xfrm>
-            <a:off x="1316736" y="3461785"/>
+            <a:off x="1755648" y="4026173"/>
             <a:ext cx="73152" cy="73152"/>
           </a:xfrm>
           <a:prstGeom prst="ellipse">
@@ -19025,7 +19144,7 @@
         </p:nvSpPr>
         <p:spPr>
           <a:xfrm>
-            <a:off x="1517904" y="3461785"/>
+            <a:off x="1956816" y="4026173"/>
             <a:ext cx="73152" cy="73152"/>
           </a:xfrm>
           <a:prstGeom prst="ellipse">
@@ -19071,7 +19190,7 @@
         </p:nvSpPr>
         <p:spPr>
           <a:xfrm>
-            <a:off x="1719072" y="3461785"/>
+            <a:off x="2157984" y="4026173"/>
             <a:ext cx="73152" cy="73152"/>
           </a:xfrm>
           <a:prstGeom prst="ellipse">
@@ -19117,7 +19236,7 @@
         </p:nvSpPr>
         <p:spPr>
           <a:xfrm>
-            <a:off x="1920240" y="3461785"/>
+            <a:off x="2359152" y="4026173"/>
             <a:ext cx="73152" cy="73152"/>
           </a:xfrm>
           <a:prstGeom prst="ellipse">
@@ -19163,7 +19282,7 @@
         </p:nvSpPr>
         <p:spPr>
           <a:xfrm>
-            <a:off x="2121408" y="3461785"/>
+            <a:off x="2560320" y="4026173"/>
             <a:ext cx="73152" cy="73152"/>
           </a:xfrm>
           <a:prstGeom prst="ellipse">
@@ -19209,7 +19328,7 @@
         </p:nvSpPr>
         <p:spPr>
           <a:xfrm>
-            <a:off x="2322576" y="3461785"/>
+            <a:off x="2761488" y="4026173"/>
             <a:ext cx="73152" cy="73152"/>
           </a:xfrm>
           <a:prstGeom prst="ellipse">
@@ -19255,7 +19374,7 @@
         </p:nvSpPr>
         <p:spPr>
           <a:xfrm>
-            <a:off x="2523744" y="3461785"/>
+            <a:off x="2962656" y="4026173"/>
             <a:ext cx="73152" cy="73152"/>
           </a:xfrm>
           <a:prstGeom prst="ellipse">
@@ -19301,7 +19420,7 @@
         </p:nvSpPr>
         <p:spPr>
           <a:xfrm>
-            <a:off x="2724912" y="3461785"/>
+            <a:off x="3163824" y="4026173"/>
             <a:ext cx="73152" cy="73152"/>
           </a:xfrm>
           <a:prstGeom prst="ellipse">
@@ -19347,7 +19466,7 @@
         </p:nvSpPr>
         <p:spPr>
           <a:xfrm>
-            <a:off x="2926080" y="3461785"/>
+            <a:off x="3364992" y="4026173"/>
             <a:ext cx="73152" cy="73152"/>
           </a:xfrm>
           <a:prstGeom prst="ellipse">
@@ -19393,7 +19512,7 @@
         </p:nvSpPr>
         <p:spPr>
           <a:xfrm>
-            <a:off x="3127248" y="3461785"/>
+            <a:off x="3566160" y="4026173"/>
             <a:ext cx="73152" cy="73152"/>
           </a:xfrm>
           <a:prstGeom prst="ellipse">
@@ -19439,7 +19558,7 @@
         </p:nvSpPr>
         <p:spPr>
           <a:xfrm>
-            <a:off x="3328415" y="3461785"/>
+            <a:off x="3767327" y="4026173"/>
             <a:ext cx="73152" cy="73152"/>
           </a:xfrm>
           <a:prstGeom prst="ellipse">
@@ -19485,7 +19604,7 @@
         </p:nvSpPr>
         <p:spPr>
           <a:xfrm>
-            <a:off x="3529584" y="3461785"/>
+            <a:off x="3968496" y="4026173"/>
             <a:ext cx="73152" cy="73152"/>
           </a:xfrm>
           <a:prstGeom prst="ellipse">
@@ -19531,7 +19650,7 @@
         </p:nvSpPr>
         <p:spPr>
           <a:xfrm>
-            <a:off x="3730752" y="3461785"/>
+            <a:off x="4169664" y="4026173"/>
             <a:ext cx="73152" cy="73152"/>
           </a:xfrm>
           <a:prstGeom prst="ellipse">
@@ -19577,7 +19696,7 @@
         </p:nvSpPr>
         <p:spPr>
           <a:xfrm>
-            <a:off x="3931920" y="3461785"/>
+            <a:off x="4370832" y="4026173"/>
             <a:ext cx="73152" cy="73152"/>
           </a:xfrm>
           <a:prstGeom prst="ellipse">
@@ -19623,7 +19742,7 @@
         </p:nvSpPr>
         <p:spPr>
           <a:xfrm>
-            <a:off x="4133088" y="3461785"/>
+            <a:off x="4572000" y="4026173"/>
             <a:ext cx="73152" cy="73152"/>
           </a:xfrm>
           <a:prstGeom prst="ellipse">
@@ -19669,7 +19788,7 @@
         </p:nvSpPr>
         <p:spPr>
           <a:xfrm>
-            <a:off x="713232" y="3662953"/>
+            <a:off x="1152144" y="4227341"/>
             <a:ext cx="73152" cy="73152"/>
           </a:xfrm>
           <a:prstGeom prst="ellipse">
@@ -19715,7 +19834,7 @@
         </p:nvSpPr>
         <p:spPr>
           <a:xfrm>
-            <a:off x="914400" y="3662953"/>
+            <a:off x="1353312" y="4227341"/>
             <a:ext cx="73152" cy="73152"/>
           </a:xfrm>
           <a:prstGeom prst="ellipse">
@@ -19761,7 +19880,7 @@
         </p:nvSpPr>
         <p:spPr>
           <a:xfrm>
-            <a:off x="1115568" y="3662953"/>
+            <a:off x="1554480" y="4227341"/>
             <a:ext cx="73152" cy="73152"/>
           </a:xfrm>
           <a:prstGeom prst="ellipse">
@@ -19807,7 +19926,7 @@
         </p:nvSpPr>
         <p:spPr>
           <a:xfrm>
-            <a:off x="1316736" y="3662953"/>
+            <a:off x="1755648" y="4227341"/>
             <a:ext cx="73152" cy="73152"/>
           </a:xfrm>
           <a:prstGeom prst="ellipse">
@@ -19853,7 +19972,7 @@
         </p:nvSpPr>
         <p:spPr>
           <a:xfrm>
-            <a:off x="1517904" y="3662953"/>
+            <a:off x="1956816" y="4227341"/>
             <a:ext cx="73152" cy="73152"/>
           </a:xfrm>
           <a:prstGeom prst="ellipse">
@@ -19899,7 +20018,7 @@
         </p:nvSpPr>
         <p:spPr>
           <a:xfrm>
-            <a:off x="1719072" y="3662953"/>
+            <a:off x="2157984" y="4227341"/>
             <a:ext cx="73152" cy="73152"/>
           </a:xfrm>
           <a:prstGeom prst="ellipse">
@@ -19945,7 +20064,7 @@
         </p:nvSpPr>
         <p:spPr>
           <a:xfrm>
-            <a:off x="1920240" y="3662953"/>
+            <a:off x="2359152" y="4227341"/>
             <a:ext cx="73152" cy="73152"/>
           </a:xfrm>
           <a:prstGeom prst="ellipse">
@@ -19991,7 +20110,7 @@
         </p:nvSpPr>
         <p:spPr>
           <a:xfrm>
-            <a:off x="2121408" y="3662953"/>
+            <a:off x="2560320" y="4227341"/>
             <a:ext cx="73152" cy="73152"/>
           </a:xfrm>
           <a:prstGeom prst="ellipse">
@@ -20037,7 +20156,7 @@
         </p:nvSpPr>
         <p:spPr>
           <a:xfrm>
-            <a:off x="2322576" y="3662953"/>
+            <a:off x="2761488" y="4227341"/>
             <a:ext cx="73152" cy="73152"/>
           </a:xfrm>
           <a:prstGeom prst="ellipse">
@@ -20083,7 +20202,7 @@
         </p:nvSpPr>
         <p:spPr>
           <a:xfrm>
-            <a:off x="2523744" y="3662953"/>
+            <a:off x="2962656" y="4227341"/>
             <a:ext cx="73152" cy="73152"/>
           </a:xfrm>
           <a:prstGeom prst="ellipse">
@@ -20129,7 +20248,7 @@
         </p:nvSpPr>
         <p:spPr>
           <a:xfrm>
-            <a:off x="2724912" y="3662953"/>
+            <a:off x="3163824" y="4227341"/>
             <a:ext cx="73152" cy="73152"/>
           </a:xfrm>
           <a:prstGeom prst="ellipse">
@@ -20175,7 +20294,7 @@
         </p:nvSpPr>
         <p:spPr>
           <a:xfrm>
-            <a:off x="2926080" y="3662953"/>
+            <a:off x="3364992" y="4227341"/>
             <a:ext cx="73152" cy="73152"/>
           </a:xfrm>
           <a:prstGeom prst="ellipse">
@@ -20221,7 +20340,7 @@
         </p:nvSpPr>
         <p:spPr>
           <a:xfrm>
-            <a:off x="3127248" y="3662953"/>
+            <a:off x="3566160" y="4227341"/>
             <a:ext cx="73152" cy="73152"/>
           </a:xfrm>
           <a:prstGeom prst="ellipse">
@@ -20267,7 +20386,7 @@
         </p:nvSpPr>
         <p:spPr>
           <a:xfrm>
-            <a:off x="3328415" y="3662953"/>
+            <a:off x="3767327" y="4227341"/>
             <a:ext cx="73152" cy="73152"/>
           </a:xfrm>
           <a:prstGeom prst="ellipse">
@@ -20313,7 +20432,7 @@
         </p:nvSpPr>
         <p:spPr>
           <a:xfrm>
-            <a:off x="3529584" y="3662953"/>
+            <a:off x="3968496" y="4227341"/>
             <a:ext cx="73152" cy="73152"/>
           </a:xfrm>
           <a:prstGeom prst="ellipse">
@@ -20359,7 +20478,7 @@
         </p:nvSpPr>
         <p:spPr>
           <a:xfrm>
-            <a:off x="3730752" y="3662953"/>
+            <a:off x="4169664" y="4227341"/>
             <a:ext cx="73152" cy="73152"/>
           </a:xfrm>
           <a:prstGeom prst="ellipse">
@@ -20405,7 +20524,7 @@
         </p:nvSpPr>
         <p:spPr>
           <a:xfrm>
-            <a:off x="3931920" y="3662953"/>
+            <a:off x="4370832" y="4227341"/>
             <a:ext cx="73152" cy="73152"/>
           </a:xfrm>
           <a:prstGeom prst="ellipse">
@@ -20451,7 +20570,7 @@
         </p:nvSpPr>
         <p:spPr>
           <a:xfrm>
-            <a:off x="4133088" y="3662953"/>
+            <a:off x="4572000" y="4227341"/>
             <a:ext cx="73152" cy="73152"/>
           </a:xfrm>
           <a:prstGeom prst="ellipse">
@@ -20497,7 +20616,7 @@
         </p:nvSpPr>
         <p:spPr>
           <a:xfrm>
-            <a:off x="713232" y="3864121"/>
+            <a:off x="1152144" y="4428509"/>
             <a:ext cx="73152" cy="73152"/>
           </a:xfrm>
           <a:prstGeom prst="ellipse">
@@ -20543,7 +20662,7 @@
         </p:nvSpPr>
         <p:spPr>
           <a:xfrm>
-            <a:off x="914400" y="3864121"/>
+            <a:off x="1353312" y="4428509"/>
             <a:ext cx="73152" cy="73152"/>
           </a:xfrm>
           <a:prstGeom prst="ellipse">
@@ -20589,7 +20708,7 @@
         </p:nvSpPr>
         <p:spPr>
           <a:xfrm>
-            <a:off x="1115568" y="3864121"/>
+            <a:off x="1554480" y="4428509"/>
             <a:ext cx="73152" cy="73152"/>
           </a:xfrm>
           <a:prstGeom prst="ellipse">
@@ -20635,7 +20754,7 @@
         </p:nvSpPr>
         <p:spPr>
           <a:xfrm>
-            <a:off x="1316736" y="3864121"/>
+            <a:off x="1755648" y="4428509"/>
             <a:ext cx="73152" cy="73152"/>
           </a:xfrm>
           <a:prstGeom prst="ellipse">
@@ -20681,7 +20800,7 @@
         </p:nvSpPr>
         <p:spPr>
           <a:xfrm>
-            <a:off x="1517904" y="3864121"/>
+            <a:off x="1956816" y="4428509"/>
             <a:ext cx="73152" cy="73152"/>
           </a:xfrm>
           <a:prstGeom prst="ellipse">
@@ -20727,7 +20846,7 @@
         </p:nvSpPr>
         <p:spPr>
           <a:xfrm>
-            <a:off x="1719072" y="3864121"/>
+            <a:off x="2157984" y="4428509"/>
             <a:ext cx="73152" cy="73152"/>
           </a:xfrm>
           <a:prstGeom prst="ellipse">
@@ -20773,7 +20892,7 @@
         </p:nvSpPr>
         <p:spPr>
           <a:xfrm>
-            <a:off x="1920240" y="3864121"/>
+            <a:off x="2359152" y="4428509"/>
             <a:ext cx="73152" cy="73152"/>
           </a:xfrm>
           <a:prstGeom prst="ellipse">
@@ -20819,7 +20938,7 @@
         </p:nvSpPr>
         <p:spPr>
           <a:xfrm>
-            <a:off x="2121408" y="3864121"/>
+            <a:off x="2560320" y="4428509"/>
             <a:ext cx="73152" cy="73152"/>
           </a:xfrm>
           <a:prstGeom prst="ellipse">
@@ -20865,7 +20984,7 @@
         </p:nvSpPr>
         <p:spPr>
           <a:xfrm>
-            <a:off x="2322576" y="3864121"/>
+            <a:off x="2761488" y="4428509"/>
             <a:ext cx="73152" cy="73152"/>
           </a:xfrm>
           <a:prstGeom prst="ellipse">
@@ -20911,7 +21030,7 @@
         </p:nvSpPr>
         <p:spPr>
           <a:xfrm>
-            <a:off x="2523744" y="3864121"/>
+            <a:off x="2962656" y="4428509"/>
             <a:ext cx="73152" cy="73152"/>
           </a:xfrm>
           <a:prstGeom prst="ellipse">
@@ -20957,7 +21076,7 @@
         </p:nvSpPr>
         <p:spPr>
           <a:xfrm>
-            <a:off x="2724912" y="3864121"/>
+            <a:off x="3163824" y="4428509"/>
             <a:ext cx="73152" cy="73152"/>
           </a:xfrm>
           <a:prstGeom prst="ellipse">
@@ -21003,7 +21122,7 @@
         </p:nvSpPr>
         <p:spPr>
           <a:xfrm>
-            <a:off x="2926080" y="3864121"/>
+            <a:off x="3364992" y="4428509"/>
             <a:ext cx="73152" cy="73152"/>
           </a:xfrm>
           <a:prstGeom prst="ellipse">
@@ -21049,7 +21168,7 @@
         </p:nvSpPr>
         <p:spPr>
           <a:xfrm>
-            <a:off x="3127248" y="3864121"/>
+            <a:off x="3566160" y="4428509"/>
             <a:ext cx="73152" cy="73152"/>
           </a:xfrm>
           <a:prstGeom prst="ellipse">
@@ -21095,7 +21214,7 @@
         </p:nvSpPr>
         <p:spPr>
           <a:xfrm>
-            <a:off x="3328415" y="3864121"/>
+            <a:off x="3767327" y="4428509"/>
             <a:ext cx="73152" cy="73152"/>
           </a:xfrm>
           <a:prstGeom prst="ellipse">
@@ -21141,7 +21260,7 @@
         </p:nvSpPr>
         <p:spPr>
           <a:xfrm>
-            <a:off x="3529584" y="3864121"/>
+            <a:off x="3968496" y="4428509"/>
             <a:ext cx="73152" cy="73152"/>
           </a:xfrm>
           <a:prstGeom prst="ellipse">
@@ -21187,7 +21306,7 @@
         </p:nvSpPr>
         <p:spPr>
           <a:xfrm>
-            <a:off x="3730752" y="3864121"/>
+            <a:off x="4169664" y="4428509"/>
             <a:ext cx="73152" cy="73152"/>
           </a:xfrm>
           <a:prstGeom prst="ellipse">
@@ -21233,7 +21352,7 @@
         </p:nvSpPr>
         <p:spPr>
           <a:xfrm>
-            <a:off x="3931920" y="3864121"/>
+            <a:off x="4370832" y="4428509"/>
             <a:ext cx="73152" cy="73152"/>
           </a:xfrm>
           <a:prstGeom prst="ellipse">
@@ -21279,7 +21398,7 @@
         </p:nvSpPr>
         <p:spPr>
           <a:xfrm>
-            <a:off x="4133088" y="3864121"/>
+            <a:off x="4572000" y="4428509"/>
             <a:ext cx="73152" cy="73152"/>
           </a:xfrm>
           <a:prstGeom prst="ellipse">
@@ -21325,7 +21444,7 @@
         </p:nvSpPr>
         <p:spPr>
           <a:xfrm>
-            <a:off x="713232" y="4065289"/>
+            <a:off x="1152144" y="4629677"/>
             <a:ext cx="73152" cy="73152"/>
           </a:xfrm>
           <a:prstGeom prst="ellipse">
@@ -21371,7 +21490,7 @@
         </p:nvSpPr>
         <p:spPr>
           <a:xfrm>
-            <a:off x="914400" y="4065289"/>
+            <a:off x="1353312" y="4629677"/>
             <a:ext cx="73152" cy="73152"/>
           </a:xfrm>
           <a:prstGeom prst="ellipse">
@@ -21417,7 +21536,7 @@
         </p:nvSpPr>
         <p:spPr>
           <a:xfrm>
-            <a:off x="1115568" y="4065289"/>
+            <a:off x="1554480" y="4629677"/>
             <a:ext cx="73152" cy="73152"/>
           </a:xfrm>
           <a:prstGeom prst="ellipse">
@@ -21463,7 +21582,7 @@
         </p:nvSpPr>
         <p:spPr>
           <a:xfrm>
-            <a:off x="1316736" y="4065289"/>
+            <a:off x="1755648" y="4629677"/>
             <a:ext cx="73152" cy="73152"/>
           </a:xfrm>
           <a:prstGeom prst="ellipse">
@@ -21509,7 +21628,7 @@
         </p:nvSpPr>
         <p:spPr>
           <a:xfrm>
-            <a:off x="1517904" y="4065289"/>
+            <a:off x="1956816" y="4629677"/>
             <a:ext cx="73152" cy="73152"/>
           </a:xfrm>
           <a:prstGeom prst="ellipse">
@@ -21555,7 +21674,7 @@
         </p:nvSpPr>
         <p:spPr>
           <a:xfrm>
-            <a:off x="1719072" y="4065289"/>
+            <a:off x="2157984" y="4629677"/>
             <a:ext cx="73152" cy="73152"/>
           </a:xfrm>
           <a:prstGeom prst="ellipse">
@@ -21601,7 +21720,7 @@
         </p:nvSpPr>
         <p:spPr>
           <a:xfrm>
-            <a:off x="1920240" y="4065289"/>
+            <a:off x="2359152" y="4629677"/>
             <a:ext cx="73152" cy="73152"/>
           </a:xfrm>
           <a:prstGeom prst="ellipse">
@@ -21647,7 +21766,7 @@
         </p:nvSpPr>
         <p:spPr>
           <a:xfrm>
-            <a:off x="2121408" y="4065289"/>
+            <a:off x="2560320" y="4629677"/>
             <a:ext cx="73152" cy="73152"/>
           </a:xfrm>
           <a:prstGeom prst="ellipse">
@@ -21693,7 +21812,7 @@
         </p:nvSpPr>
         <p:spPr>
           <a:xfrm>
-            <a:off x="2322576" y="4065289"/>
+            <a:off x="2761488" y="4629677"/>
             <a:ext cx="73152" cy="73152"/>
           </a:xfrm>
           <a:prstGeom prst="ellipse">
@@ -21739,7 +21858,7 @@
         </p:nvSpPr>
         <p:spPr>
           <a:xfrm>
-            <a:off x="2523744" y="4065289"/>
+            <a:off x="2962656" y="4629677"/>
             <a:ext cx="73152" cy="73152"/>
           </a:xfrm>
           <a:prstGeom prst="ellipse">
@@ -21785,7 +21904,7 @@
         </p:nvSpPr>
         <p:spPr>
           <a:xfrm>
-            <a:off x="2724912" y="4065289"/>
+            <a:off x="3163824" y="4629677"/>
             <a:ext cx="73152" cy="73152"/>
           </a:xfrm>
           <a:prstGeom prst="ellipse">
@@ -21831,7 +21950,7 @@
         </p:nvSpPr>
         <p:spPr>
           <a:xfrm>
-            <a:off x="2926080" y="4065289"/>
+            <a:off x="3364992" y="4629677"/>
             <a:ext cx="73152" cy="73152"/>
           </a:xfrm>
           <a:prstGeom prst="ellipse">
@@ -21877,7 +21996,7 @@
         </p:nvSpPr>
         <p:spPr>
           <a:xfrm>
-            <a:off x="3127248" y="4065289"/>
+            <a:off x="3566160" y="4629677"/>
             <a:ext cx="73152" cy="73152"/>
           </a:xfrm>
           <a:prstGeom prst="ellipse">
@@ -21923,7 +22042,7 @@
         </p:nvSpPr>
         <p:spPr>
           <a:xfrm>
-            <a:off x="3328415" y="4065289"/>
+            <a:off x="3767327" y="4629677"/>
             <a:ext cx="73152" cy="73152"/>
           </a:xfrm>
           <a:prstGeom prst="ellipse">
@@ -21969,7 +22088,7 @@
         </p:nvSpPr>
         <p:spPr>
           <a:xfrm>
-            <a:off x="3529584" y="4065289"/>
+            <a:off x="3968496" y="4629677"/>
             <a:ext cx="73152" cy="73152"/>
           </a:xfrm>
           <a:prstGeom prst="ellipse">
@@ -22015,7 +22134,7 @@
         </p:nvSpPr>
         <p:spPr>
           <a:xfrm>
-            <a:off x="3730752" y="4065289"/>
+            <a:off x="4169664" y="4629677"/>
             <a:ext cx="73152" cy="73152"/>
           </a:xfrm>
           <a:prstGeom prst="ellipse">
@@ -22061,7 +22180,7 @@
         </p:nvSpPr>
         <p:spPr>
           <a:xfrm>
-            <a:off x="3931920" y="4065289"/>
+            <a:off x="4370832" y="4629677"/>
             <a:ext cx="73152" cy="73152"/>
           </a:xfrm>
           <a:prstGeom prst="ellipse">
@@ -22107,7 +22226,7 @@
         </p:nvSpPr>
         <p:spPr>
           <a:xfrm>
-            <a:off x="4133088" y="4065289"/>
+            <a:off x="4572000" y="4629677"/>
             <a:ext cx="73152" cy="73152"/>
           </a:xfrm>
           <a:prstGeom prst="ellipse">
@@ -22153,7 +22272,7 @@
         </p:nvSpPr>
         <p:spPr>
           <a:xfrm>
-            <a:off x="713232" y="4266457"/>
+            <a:off x="1152144" y="4830845"/>
             <a:ext cx="73152" cy="73152"/>
           </a:xfrm>
           <a:prstGeom prst="ellipse">
@@ -22199,7 +22318,7 @@
         </p:nvSpPr>
         <p:spPr>
           <a:xfrm>
-            <a:off x="914400" y="4266457"/>
+            <a:off x="1353312" y="4830845"/>
             <a:ext cx="73152" cy="73152"/>
           </a:xfrm>
           <a:prstGeom prst="ellipse">
@@ -22245,7 +22364,7 @@
         </p:nvSpPr>
         <p:spPr>
           <a:xfrm>
-            <a:off x="1115568" y="4266457"/>
+            <a:off x="1554480" y="4830845"/>
             <a:ext cx="73152" cy="73152"/>
           </a:xfrm>
           <a:prstGeom prst="ellipse">
@@ -22291,7 +22410,7 @@
         </p:nvSpPr>
         <p:spPr>
           <a:xfrm>
-            <a:off x="1316736" y="4266457"/>
+            <a:off x="1755648" y="4830845"/>
             <a:ext cx="73152" cy="73152"/>
           </a:xfrm>
           <a:prstGeom prst="ellipse">
@@ -22337,7 +22456,7 @@
         </p:nvSpPr>
         <p:spPr>
           <a:xfrm>
-            <a:off x="1517904" y="4266457"/>
+            <a:off x="1956816" y="4830845"/>
             <a:ext cx="73152" cy="73152"/>
           </a:xfrm>
           <a:prstGeom prst="ellipse">
@@ -22383,7 +22502,7 @@
         </p:nvSpPr>
         <p:spPr>
           <a:xfrm>
-            <a:off x="1719072" y="4266457"/>
+            <a:off x="2157984" y="4830845"/>
             <a:ext cx="73152" cy="73152"/>
           </a:xfrm>
           <a:prstGeom prst="ellipse">
@@ -22429,7 +22548,7 @@
         </p:nvSpPr>
         <p:spPr>
           <a:xfrm>
-            <a:off x="1920240" y="4266457"/>
+            <a:off x="2359152" y="4830845"/>
             <a:ext cx="73152" cy="73152"/>
           </a:xfrm>
           <a:prstGeom prst="ellipse">
@@ -22475,7 +22594,7 @@
         </p:nvSpPr>
         <p:spPr>
           <a:xfrm>
-            <a:off x="2121408" y="4266457"/>
+            <a:off x="2560320" y="4830845"/>
             <a:ext cx="73152" cy="73152"/>
           </a:xfrm>
           <a:prstGeom prst="ellipse">
@@ -22521,7 +22640,7 @@
         </p:nvSpPr>
         <p:spPr>
           <a:xfrm>
-            <a:off x="2322576" y="4266457"/>
+            <a:off x="2761488" y="4830845"/>
             <a:ext cx="73152" cy="73152"/>
           </a:xfrm>
           <a:prstGeom prst="ellipse">
@@ -22567,7 +22686,7 @@
         </p:nvSpPr>
         <p:spPr>
           <a:xfrm>
-            <a:off x="2523744" y="4266457"/>
+            <a:off x="2962656" y="4830845"/>
             <a:ext cx="73152" cy="73152"/>
           </a:xfrm>
           <a:prstGeom prst="ellipse">
@@ -22613,7 +22732,7 @@
         </p:nvSpPr>
         <p:spPr>
           <a:xfrm>
-            <a:off x="2724912" y="4266457"/>
+            <a:off x="3163824" y="4830845"/>
             <a:ext cx="73152" cy="73152"/>
           </a:xfrm>
           <a:prstGeom prst="ellipse">
@@ -22659,7 +22778,7 @@
         </p:nvSpPr>
         <p:spPr>
           <a:xfrm>
-            <a:off x="2926080" y="4266457"/>
+            <a:off x="3364992" y="4830845"/>
             <a:ext cx="73152" cy="73152"/>
           </a:xfrm>
           <a:prstGeom prst="ellipse">
@@ -22705,7 +22824,7 @@
         </p:nvSpPr>
         <p:spPr>
           <a:xfrm>
-            <a:off x="3127248" y="4266457"/>
+            <a:off x="3566160" y="4830845"/>
             <a:ext cx="73152" cy="73152"/>
           </a:xfrm>
           <a:prstGeom prst="ellipse">
@@ -22751,7 +22870,7 @@
         </p:nvSpPr>
         <p:spPr>
           <a:xfrm>
-            <a:off x="3328415" y="4266457"/>
+            <a:off x="3767327" y="4830845"/>
             <a:ext cx="73152" cy="73152"/>
           </a:xfrm>
           <a:prstGeom prst="ellipse">
@@ -22797,7 +22916,7 @@
         </p:nvSpPr>
         <p:spPr>
           <a:xfrm>
-            <a:off x="3529584" y="4266457"/>
+            <a:off x="3968496" y="4830845"/>
             <a:ext cx="73152" cy="73152"/>
           </a:xfrm>
           <a:prstGeom prst="ellipse">
@@ -22843,7 +22962,7 @@
         </p:nvSpPr>
         <p:spPr>
           <a:xfrm>
-            <a:off x="3730752" y="4266457"/>
+            <a:off x="4169664" y="4830845"/>
             <a:ext cx="73152" cy="73152"/>
           </a:xfrm>
           <a:prstGeom prst="ellipse">
@@ -22889,7 +23008,7 @@
         </p:nvSpPr>
         <p:spPr>
           <a:xfrm>
-            <a:off x="3931920" y="4266457"/>
+            <a:off x="4370832" y="4830845"/>
             <a:ext cx="73152" cy="73152"/>
           </a:xfrm>
           <a:prstGeom prst="ellipse">
@@ -22935,7 +23054,7 @@
         </p:nvSpPr>
         <p:spPr>
           <a:xfrm>
-            <a:off x="4133088" y="4266457"/>
+            <a:off x="4572000" y="4830845"/>
             <a:ext cx="73152" cy="73152"/>
           </a:xfrm>
           <a:prstGeom prst="ellipse">
@@ -22981,7 +23100,7 @@
         </p:nvSpPr>
         <p:spPr>
           <a:xfrm>
-            <a:off x="713232" y="4467625"/>
+            <a:off x="1152144" y="5032013"/>
             <a:ext cx="73152" cy="73152"/>
           </a:xfrm>
           <a:prstGeom prst="ellipse">
@@ -23027,7 +23146,7 @@
         </p:nvSpPr>
         <p:spPr>
           <a:xfrm>
-            <a:off x="914400" y="4467625"/>
+            <a:off x="1353312" y="5032013"/>
             <a:ext cx="73152" cy="73152"/>
           </a:xfrm>
           <a:prstGeom prst="ellipse">
@@ -23073,7 +23192,7 @@
         </p:nvSpPr>
         <p:spPr>
           <a:xfrm>
-            <a:off x="1115568" y="4467625"/>
+            <a:off x="1554480" y="5032013"/>
             <a:ext cx="73152" cy="73152"/>
           </a:xfrm>
           <a:prstGeom prst="ellipse">
@@ -23119,7 +23238,7 @@
         </p:nvSpPr>
         <p:spPr>
           <a:xfrm>
-            <a:off x="1316736" y="4467625"/>
+            <a:off x="1755648" y="5032013"/>
             <a:ext cx="73152" cy="73152"/>
           </a:xfrm>
           <a:prstGeom prst="ellipse">
@@ -23165,7 +23284,7 @@
         </p:nvSpPr>
         <p:spPr>
           <a:xfrm>
-            <a:off x="1517904" y="4467625"/>
+            <a:off x="1956816" y="5032013"/>
             <a:ext cx="73152" cy="73152"/>
           </a:xfrm>
           <a:prstGeom prst="ellipse">
@@ -23211,7 +23330,7 @@
         </p:nvSpPr>
         <p:spPr>
           <a:xfrm>
-            <a:off x="1719072" y="4467625"/>
+            <a:off x="2157984" y="5032013"/>
             <a:ext cx="73152" cy="73152"/>
           </a:xfrm>
           <a:prstGeom prst="ellipse">
@@ -23257,7 +23376,7 @@
         </p:nvSpPr>
         <p:spPr>
           <a:xfrm>
-            <a:off x="1920240" y="4467625"/>
+            <a:off x="2359152" y="5032013"/>
             <a:ext cx="73152" cy="73152"/>
           </a:xfrm>
           <a:prstGeom prst="ellipse">
@@ -23303,7 +23422,7 @@
         </p:nvSpPr>
         <p:spPr>
           <a:xfrm>
-            <a:off x="2121408" y="4467625"/>
+            <a:off x="2560320" y="5032013"/>
             <a:ext cx="73152" cy="73152"/>
           </a:xfrm>
           <a:prstGeom prst="ellipse">
@@ -23349,7 +23468,7 @@
         </p:nvSpPr>
         <p:spPr>
           <a:xfrm>
-            <a:off x="2322576" y="4467625"/>
+            <a:off x="2761488" y="5032013"/>
             <a:ext cx="73152" cy="73152"/>
           </a:xfrm>
           <a:prstGeom prst="ellipse">
@@ -23395,7 +23514,7 @@
         </p:nvSpPr>
         <p:spPr>
           <a:xfrm>
-            <a:off x="2523744" y="4467625"/>
+            <a:off x="2962656" y="5032013"/>
             <a:ext cx="73152" cy="73152"/>
           </a:xfrm>
           <a:prstGeom prst="ellipse">
@@ -23441,7 +23560,7 @@
         </p:nvSpPr>
         <p:spPr>
           <a:xfrm>
-            <a:off x="2724912" y="4467625"/>
+            <a:off x="3163824" y="5032013"/>
             <a:ext cx="73152" cy="73152"/>
           </a:xfrm>
           <a:prstGeom prst="ellipse">
@@ -23487,7 +23606,7 @@
         </p:nvSpPr>
         <p:spPr>
           <a:xfrm>
-            <a:off x="2926080" y="4467625"/>
+            <a:off x="3364992" y="5032013"/>
             <a:ext cx="73152" cy="73152"/>
           </a:xfrm>
           <a:prstGeom prst="ellipse">
@@ -23533,7 +23652,7 @@
         </p:nvSpPr>
         <p:spPr>
           <a:xfrm>
-            <a:off x="3127248" y="4467625"/>
+            <a:off x="3566160" y="5032013"/>
             <a:ext cx="73152" cy="73152"/>
           </a:xfrm>
           <a:prstGeom prst="ellipse">
@@ -23579,7 +23698,7 @@
         </p:nvSpPr>
         <p:spPr>
           <a:xfrm>
-            <a:off x="3328415" y="4467625"/>
+            <a:off x="3767327" y="5032013"/>
             <a:ext cx="73152" cy="73152"/>
           </a:xfrm>
           <a:prstGeom prst="ellipse">
@@ -23625,7 +23744,7 @@
         </p:nvSpPr>
         <p:spPr>
           <a:xfrm>
-            <a:off x="3529584" y="4467625"/>
+            <a:off x="3968496" y="5032013"/>
             <a:ext cx="73152" cy="73152"/>
           </a:xfrm>
           <a:prstGeom prst="ellipse">
@@ -23671,7 +23790,7 @@
         </p:nvSpPr>
         <p:spPr>
           <a:xfrm>
-            <a:off x="3730752" y="4467625"/>
+            <a:off x="4169664" y="5032013"/>
             <a:ext cx="73152" cy="73152"/>
           </a:xfrm>
           <a:prstGeom prst="ellipse">
@@ -23717,7 +23836,7 @@
         </p:nvSpPr>
         <p:spPr>
           <a:xfrm>
-            <a:off x="3931920" y="4467625"/>
+            <a:off x="4370832" y="5032013"/>
             <a:ext cx="73152" cy="73152"/>
           </a:xfrm>
           <a:prstGeom prst="ellipse">
@@ -23763,7 +23882,7 @@
         </p:nvSpPr>
         <p:spPr>
           <a:xfrm>
-            <a:off x="4133088" y="4467625"/>
+            <a:off x="4572000" y="5032013"/>
             <a:ext cx="73152" cy="73152"/>
           </a:xfrm>
           <a:prstGeom prst="ellipse">
@@ -23809,7 +23928,7 @@
         </p:nvSpPr>
         <p:spPr>
           <a:xfrm>
-            <a:off x="713232" y="4668793"/>
+            <a:off x="1152144" y="5233181"/>
             <a:ext cx="73152" cy="73152"/>
           </a:xfrm>
           <a:prstGeom prst="ellipse">
@@ -23855,7 +23974,7 @@
         </p:nvSpPr>
         <p:spPr>
           <a:xfrm>
-            <a:off x="914400" y="4668793"/>
+            <a:off x="1353312" y="5233181"/>
             <a:ext cx="73152" cy="73152"/>
           </a:xfrm>
           <a:prstGeom prst="ellipse">
@@ -23901,7 +24020,7 @@
         </p:nvSpPr>
         <p:spPr>
           <a:xfrm>
-            <a:off x="1115568" y="4668793"/>
+            <a:off x="1554480" y="5233181"/>
             <a:ext cx="73152" cy="73152"/>
           </a:xfrm>
           <a:prstGeom prst="ellipse">
@@ -23947,7 +24066,7 @@
         </p:nvSpPr>
         <p:spPr>
           <a:xfrm>
-            <a:off x="1316736" y="4668793"/>
+            <a:off x="1755648" y="5233181"/>
             <a:ext cx="73152" cy="73152"/>
           </a:xfrm>
           <a:prstGeom prst="ellipse">
@@ -23993,7 +24112,7 @@
         </p:nvSpPr>
         <p:spPr>
           <a:xfrm>
-            <a:off x="1517904" y="4668793"/>
+            <a:off x="1956816" y="5233181"/>
             <a:ext cx="73152" cy="73152"/>
           </a:xfrm>
           <a:prstGeom prst="ellipse">
@@ -24039,7 +24158,7 @@
         </p:nvSpPr>
         <p:spPr>
           <a:xfrm>
-            <a:off x="1719072" y="4668793"/>
+            <a:off x="2157984" y="5233181"/>
             <a:ext cx="73152" cy="73152"/>
           </a:xfrm>
           <a:prstGeom prst="ellipse">
@@ -24085,7 +24204,7 @@
         </p:nvSpPr>
         <p:spPr>
           <a:xfrm>
-            <a:off x="1920240" y="4668793"/>
+            <a:off x="2359152" y="5233181"/>
             <a:ext cx="73152" cy="73152"/>
           </a:xfrm>
           <a:prstGeom prst="ellipse">
@@ -24131,7 +24250,7 @@
         </p:nvSpPr>
         <p:spPr>
           <a:xfrm>
-            <a:off x="2121408" y="4668793"/>
+            <a:off x="2560320" y="5233181"/>
             <a:ext cx="73152" cy="73152"/>
           </a:xfrm>
           <a:prstGeom prst="ellipse">
@@ -24177,7 +24296,7 @@
         </p:nvSpPr>
         <p:spPr>
           <a:xfrm>
-            <a:off x="2322576" y="4668793"/>
+            <a:off x="2761488" y="5233181"/>
             <a:ext cx="73152" cy="73152"/>
           </a:xfrm>
           <a:prstGeom prst="ellipse">
@@ -24223,7 +24342,7 @@
         </p:nvSpPr>
         <p:spPr>
           <a:xfrm>
-            <a:off x="2523744" y="4668793"/>
+            <a:off x="2962656" y="5233181"/>
             <a:ext cx="73152" cy="73152"/>
           </a:xfrm>
           <a:prstGeom prst="ellipse">
@@ -24269,7 +24388,7 @@
         </p:nvSpPr>
         <p:spPr>
           <a:xfrm>
-            <a:off x="2724912" y="4668793"/>
+            <a:off x="3163824" y="5233181"/>
             <a:ext cx="73152" cy="73152"/>
           </a:xfrm>
           <a:prstGeom prst="ellipse">
@@ -24315,7 +24434,7 @@
         </p:nvSpPr>
         <p:spPr>
           <a:xfrm>
-            <a:off x="2926080" y="4668793"/>
+            <a:off x="3364992" y="5233181"/>
             <a:ext cx="73152" cy="73152"/>
           </a:xfrm>
           <a:prstGeom prst="ellipse">
@@ -24361,7 +24480,7 @@
         </p:nvSpPr>
         <p:spPr>
           <a:xfrm>
-            <a:off x="3127248" y="4668793"/>
+            <a:off x="3566160" y="5233181"/>
             <a:ext cx="73152" cy="73152"/>
           </a:xfrm>
           <a:prstGeom prst="ellipse">
@@ -24407,7 +24526,7 @@
         </p:nvSpPr>
         <p:spPr>
           <a:xfrm>
-            <a:off x="3328415" y="4668793"/>
+            <a:off x="3767327" y="5233181"/>
             <a:ext cx="73152" cy="73152"/>
           </a:xfrm>
           <a:prstGeom prst="ellipse">
@@ -24453,7 +24572,7 @@
         </p:nvSpPr>
         <p:spPr>
           <a:xfrm>
-            <a:off x="3529584" y="4668793"/>
+            <a:off x="3968496" y="5233181"/>
             <a:ext cx="73152" cy="73152"/>
           </a:xfrm>
           <a:prstGeom prst="ellipse">
@@ -24499,7 +24618,7 @@
         </p:nvSpPr>
         <p:spPr>
           <a:xfrm>
-            <a:off x="3730752" y="4668793"/>
+            <a:off x="4169664" y="5233181"/>
             <a:ext cx="73152" cy="73152"/>
           </a:xfrm>
           <a:prstGeom prst="ellipse">
@@ -24545,7 +24664,7 @@
         </p:nvSpPr>
         <p:spPr>
           <a:xfrm>
-            <a:off x="3931920" y="4668793"/>
+            <a:off x="4370832" y="5233181"/>
             <a:ext cx="73152" cy="73152"/>
           </a:xfrm>
           <a:prstGeom prst="ellipse">
@@ -24591,7 +24710,7 @@
         </p:nvSpPr>
         <p:spPr>
           <a:xfrm>
-            <a:off x="4133088" y="4668793"/>
+            <a:off x="4572000" y="5233181"/>
             <a:ext cx="73152" cy="73152"/>
           </a:xfrm>
           <a:prstGeom prst="ellipse">
@@ -24637,7 +24756,7 @@
         </p:nvSpPr>
         <p:spPr>
           <a:xfrm>
-            <a:off x="713232" y="4869960"/>
+            <a:off x="1152144" y="5434348"/>
             <a:ext cx="73152" cy="73152"/>
           </a:xfrm>
           <a:prstGeom prst="ellipse">
@@ -24683,7 +24802,7 @@
         </p:nvSpPr>
         <p:spPr>
           <a:xfrm>
-            <a:off x="914400" y="4869960"/>
+            <a:off x="1353312" y="5434348"/>
             <a:ext cx="73152" cy="73152"/>
           </a:xfrm>
           <a:prstGeom prst="ellipse">
@@ -24729,7 +24848,7 @@
         </p:nvSpPr>
         <p:spPr>
           <a:xfrm>
-            <a:off x="1115568" y="4869960"/>
+            <a:off x="1554480" y="5434348"/>
             <a:ext cx="73152" cy="73152"/>
           </a:xfrm>
           <a:prstGeom prst="ellipse">
@@ -24775,7 +24894,7 @@
         </p:nvSpPr>
         <p:spPr>
           <a:xfrm>
-            <a:off x="1316736" y="4869960"/>
+            <a:off x="1755648" y="5434348"/>
             <a:ext cx="73152" cy="73152"/>
           </a:xfrm>
           <a:prstGeom prst="ellipse">
@@ -24821,7 +24940,7 @@
         </p:nvSpPr>
         <p:spPr>
           <a:xfrm>
-            <a:off x="1517904" y="4869960"/>
+            <a:off x="1956816" y="5434348"/>
             <a:ext cx="73152" cy="73152"/>
           </a:xfrm>
           <a:prstGeom prst="ellipse">
@@ -24867,7 +24986,7 @@
         </p:nvSpPr>
         <p:spPr>
           <a:xfrm>
-            <a:off x="1719072" y="4869960"/>
+            <a:off x="2157984" y="5434348"/>
             <a:ext cx="73152" cy="73152"/>
           </a:xfrm>
           <a:prstGeom prst="ellipse">
@@ -24913,7 +25032,7 @@
         </p:nvSpPr>
         <p:spPr>
           <a:xfrm>
-            <a:off x="1920240" y="4869960"/>
+            <a:off x="2359152" y="5434348"/>
             <a:ext cx="73152" cy="73152"/>
           </a:xfrm>
           <a:prstGeom prst="ellipse">
@@ -24959,7 +25078,7 @@
         </p:nvSpPr>
         <p:spPr>
           <a:xfrm>
-            <a:off x="2121408" y="4869960"/>
+            <a:off x="2560320" y="5434348"/>
             <a:ext cx="73152" cy="73152"/>
           </a:xfrm>
           <a:prstGeom prst="ellipse">
@@ -25005,7 +25124,7 @@
         </p:nvSpPr>
         <p:spPr>
           <a:xfrm>
-            <a:off x="2322576" y="4869960"/>
+            <a:off x="2761488" y="5434348"/>
             <a:ext cx="73152" cy="73152"/>
           </a:xfrm>
           <a:prstGeom prst="ellipse">
@@ -25051,7 +25170,7 @@
         </p:nvSpPr>
         <p:spPr>
           <a:xfrm>
-            <a:off x="2523744" y="4869960"/>
+            <a:off x="2962656" y="5434348"/>
             <a:ext cx="73152" cy="73152"/>
           </a:xfrm>
           <a:prstGeom prst="ellipse">
@@ -25097,7 +25216,7 @@
         </p:nvSpPr>
         <p:spPr>
           <a:xfrm>
-            <a:off x="2724912" y="4869960"/>
+            <a:off x="3163824" y="5434348"/>
             <a:ext cx="73152" cy="73152"/>
           </a:xfrm>
           <a:prstGeom prst="ellipse">
@@ -25143,7 +25262,7 @@
         </p:nvSpPr>
         <p:spPr>
           <a:xfrm>
-            <a:off x="2926080" y="4869960"/>
+            <a:off x="3364992" y="5434348"/>
             <a:ext cx="73152" cy="73152"/>
           </a:xfrm>
           <a:prstGeom prst="ellipse">
@@ -25189,7 +25308,7 @@
         </p:nvSpPr>
         <p:spPr>
           <a:xfrm>
-            <a:off x="3127248" y="4869960"/>
+            <a:off x="3566160" y="5434348"/>
             <a:ext cx="73152" cy="73152"/>
           </a:xfrm>
           <a:prstGeom prst="ellipse">
@@ -25235,7 +25354,7 @@
         </p:nvSpPr>
         <p:spPr>
           <a:xfrm>
-            <a:off x="3328415" y="4869960"/>
+            <a:off x="3767327" y="5434348"/>
             <a:ext cx="73152" cy="73152"/>
           </a:xfrm>
           <a:prstGeom prst="ellipse">
@@ -25281,7 +25400,7 @@
         </p:nvSpPr>
         <p:spPr>
           <a:xfrm>
-            <a:off x="3529584" y="4869960"/>
+            <a:off x="3968496" y="5434348"/>
             <a:ext cx="73152" cy="73152"/>
           </a:xfrm>
           <a:prstGeom prst="ellipse">
@@ -25327,7 +25446,7 @@
         </p:nvSpPr>
         <p:spPr>
           <a:xfrm>
-            <a:off x="3730752" y="4869960"/>
+            <a:off x="4169664" y="5434348"/>
             <a:ext cx="73152" cy="73152"/>
           </a:xfrm>
           <a:prstGeom prst="ellipse">
@@ -25373,7 +25492,7 @@
         </p:nvSpPr>
         <p:spPr>
           <a:xfrm>
-            <a:off x="3931920" y="4869960"/>
+            <a:off x="4370832" y="5434348"/>
             <a:ext cx="73152" cy="73152"/>
           </a:xfrm>
           <a:prstGeom prst="ellipse">
@@ -25419,7 +25538,7 @@
         </p:nvSpPr>
         <p:spPr>
           <a:xfrm>
-            <a:off x="4133088" y="4869960"/>
+            <a:off x="4572000" y="5434348"/>
             <a:ext cx="73152" cy="73152"/>
           </a:xfrm>
           <a:prstGeom prst="ellipse">
@@ -25465,7 +25584,7 @@
         </p:nvSpPr>
         <p:spPr>
           <a:xfrm>
-            <a:off x="4754880" y="1831858"/>
+            <a:off x="5199380" y="1916430"/>
             <a:ext cx="822960" cy="475488"/>
           </a:xfrm>
           <a:prstGeom prst="rect">
@@ -25519,7 +25638,7 @@
         </p:nvSpPr>
         <p:spPr>
           <a:xfrm>
-            <a:off x="5715000" y="1600962"/>
+            <a:off x="6197600" y="1573531"/>
             <a:ext cx="2057400" cy="1234440"/>
           </a:xfrm>
           <a:prstGeom prst="rect">
@@ -25565,7 +25684,7 @@
         </p:nvSpPr>
         <p:spPr>
           <a:xfrm>
-            <a:off x="5870448" y="1802130"/>
+            <a:off x="6353048" y="1774699"/>
             <a:ext cx="1737360" cy="292608"/>
           </a:xfrm>
           <a:prstGeom prst="rect">
@@ -25619,7 +25738,7 @@
         </p:nvSpPr>
         <p:spPr>
           <a:xfrm>
-            <a:off x="5870448" y="2122169"/>
+            <a:off x="6353048" y="2094738"/>
             <a:ext cx="1737360" cy="457200"/>
           </a:xfrm>
           <a:prstGeom prst="rect">
@@ -25673,7 +25792,7 @@
         </p:nvSpPr>
         <p:spPr>
           <a:xfrm>
-            <a:off x="8046720" y="1600962"/>
+            <a:off x="8529320" y="1573531"/>
             <a:ext cx="2057400" cy="1234440"/>
           </a:xfrm>
           <a:prstGeom prst="rect">
@@ -25719,7 +25838,7 @@
         </p:nvSpPr>
         <p:spPr>
           <a:xfrm>
-            <a:off x="8202168" y="1802130"/>
+            <a:off x="8684768" y="1774699"/>
             <a:ext cx="1737360" cy="292608"/>
           </a:xfrm>
           <a:prstGeom prst="rect">
@@ -25773,7 +25892,7 @@
         </p:nvSpPr>
         <p:spPr>
           <a:xfrm>
-            <a:off x="8202168" y="2122169"/>
+            <a:off x="8684768" y="2094738"/>
             <a:ext cx="1737360" cy="457200"/>
           </a:xfrm>
           <a:prstGeom prst="rect">
@@ -25827,8 +25946,8 @@
         </p:nvSpPr>
         <p:spPr>
           <a:xfrm>
-            <a:off x="5715000" y="3402329"/>
-            <a:ext cx="5303520" cy="937271"/>
+            <a:off x="5422900" y="3428999"/>
+            <a:ext cx="5805932" cy="1111777"/>
           </a:xfrm>
           <a:prstGeom prst="rect">
             <a:avLst/>
@@ -25881,8 +26000,8 @@
         </p:nvSpPr>
         <p:spPr>
           <a:xfrm>
-            <a:off x="5715000" y="4499610"/>
-            <a:ext cx="5120640" cy="777240"/>
+            <a:off x="5422900" y="4869959"/>
+            <a:ext cx="5805932" cy="1073625"/>
           </a:xfrm>
           <a:prstGeom prst="rect">
             <a:avLst/>
@@ -34249,7 +34368,7 @@
         </p:nvSpPr>
         <p:spPr>
           <a:xfrm>
-            <a:off x="7360920" y="1353312"/>
+            <a:off x="7360920" y="1466704"/>
             <a:ext cx="3886200" cy="1874519"/>
           </a:xfrm>
           <a:prstGeom prst="rect">
@@ -34295,7 +34414,7 @@
         </p:nvSpPr>
         <p:spPr>
           <a:xfrm>
-            <a:off x="7644383" y="1572768"/>
+            <a:off x="7644383" y="1686160"/>
             <a:ext cx="3383280" cy="237744"/>
           </a:xfrm>
           <a:prstGeom prst="rect">
@@ -34349,7 +34468,7 @@
         </p:nvSpPr>
         <p:spPr>
           <a:xfrm>
-            <a:off x="7644383" y="1938528"/>
+            <a:off x="7644383" y="2051920"/>
             <a:ext cx="3383280" cy="274320"/>
           </a:xfrm>
           <a:prstGeom prst="rect">
@@ -34403,7 +34522,7 @@
         </p:nvSpPr>
         <p:spPr>
           <a:xfrm>
-            <a:off x="7644383" y="2331720"/>
+            <a:off x="7644383" y="2445112"/>
             <a:ext cx="3383280" cy="274320"/>
           </a:xfrm>
           <a:prstGeom prst="rect">
@@ -34457,7 +34576,7 @@
         </p:nvSpPr>
         <p:spPr>
           <a:xfrm>
-            <a:off x="7644383" y="2724912"/>
+            <a:off x="7644383" y="2838304"/>
             <a:ext cx="3383280" cy="274320"/>
           </a:xfrm>
           <a:prstGeom prst="rect">
@@ -34511,7 +34630,7 @@
         </p:nvCxnSpPr>
         <p:spPr>
           <a:xfrm>
-            <a:off x="914400" y="3694176"/>
+            <a:off x="914400" y="4059644"/>
             <a:ext cx="10241280" cy="0"/>
           </a:xfrm>
           <a:prstGeom prst="line">
@@ -34546,7 +34665,7 @@
         </p:nvSpPr>
         <p:spPr>
           <a:xfrm>
-            <a:off x="914400" y="4041648"/>
+            <a:off x="914400" y="4352144"/>
             <a:ext cx="4800600" cy="1325880"/>
           </a:xfrm>
           <a:prstGeom prst="rect">
@@ -34592,7 +34711,7 @@
         </p:nvSpPr>
         <p:spPr>
           <a:xfrm>
-            <a:off x="1143000" y="4270248"/>
+            <a:off x="1143000" y="4580744"/>
             <a:ext cx="4343400" cy="320040"/>
           </a:xfrm>
           <a:prstGeom prst="rect">
@@ -34646,7 +34765,7 @@
         </p:nvSpPr>
         <p:spPr>
           <a:xfrm>
-            <a:off x="1143000" y="4681727"/>
+            <a:off x="1143000" y="4992223"/>
             <a:ext cx="4297680" cy="530969"/>
           </a:xfrm>
           <a:prstGeom prst="rect">
@@ -34700,7 +34819,7 @@
         </p:nvSpPr>
         <p:spPr>
           <a:xfrm>
-            <a:off x="6400800" y="4041648"/>
+            <a:off x="6400800" y="4352144"/>
             <a:ext cx="4800600" cy="1325880"/>
           </a:xfrm>
           <a:prstGeom prst="rect">
@@ -34746,7 +34865,7 @@
         </p:nvSpPr>
         <p:spPr>
           <a:xfrm>
-            <a:off x="6629400" y="4270248"/>
+            <a:off x="6629400" y="4580744"/>
             <a:ext cx="4343400" cy="320040"/>
           </a:xfrm>
           <a:prstGeom prst="rect">
@@ -34800,7 +34919,7 @@
         </p:nvSpPr>
         <p:spPr>
           <a:xfrm>
-            <a:off x="6629400" y="4681727"/>
+            <a:off x="6629400" y="4992223"/>
             <a:ext cx="4297680" cy="530969"/>
           </a:xfrm>
           <a:prstGeom prst="rect">
@@ -34842,60 +34961,6 @@
                 <a:latin typeface="Aptos"/>
               </a:rPr>
               <a:t>The model repeatedly struggles with that label.</a:t>
-            </a:r>
-          </a:p>
-        </p:txBody>
-      </p:sp>
-      <p:sp>
-        <p:nvSpPr>
-          <p:cNvPr id="21" name="Rectangle 20"/>
-          <p:cNvSpPr/>
-          <p:nvPr/>
-        </p:nvSpPr>
-        <p:spPr>
-          <a:xfrm>
-            <a:off x="960120" y="5870448"/>
-            <a:ext cx="10287000" cy="274320"/>
-          </a:xfrm>
-          <a:prstGeom prst="rect">
-            <a:avLst/>
-          </a:prstGeom>
-          <a:solidFill>
-            <a:srgbClr val="F7F5F0"/>
-          </a:solidFill>
-          <a:ln>
-            <a:solidFill>
-              <a:srgbClr val="F7F5F0"/>
-            </a:solidFill>
-          </a:ln>
-        </p:spPr>
-        <p:style>
-          <a:lnRef idx="1">
-            <a:schemeClr val="accent1"/>
-          </a:lnRef>
-          <a:fillRef idx="3">
-            <a:schemeClr val="accent1"/>
-          </a:fillRef>
-          <a:effectRef idx="2">
-            <a:schemeClr val="accent1"/>
-          </a:effectRef>
-          <a:fontRef idx="minor">
-            <a:schemeClr val="lt1"/>
-          </a:fontRef>
-        </p:style>
-        <p:txBody>
-          <a:bodyPr lIns="36576" tIns="36576" rIns="36576" bIns="36576" rtlCol="0" anchor="t"/>
-          <a:lstStyle/>
-          <a:p>
-            <a:pPr algn="ctr"/>
-            <a:r>
-              <a:rPr sz="1300" b="0" i="1">
-                <a:solidFill>
-                  <a:srgbClr val="5F6B75"/>
-                </a:solidFill>
-                <a:latin typeface="Aptos"/>
-              </a:rPr>
-              <a:t>Confidence is relative to the gold label and to this model and training procedure.</a:t>
             </a:r>
           </a:p>
         </p:txBody>
@@ -38509,60 +38574,6 @@
                 <a:latin typeface="Aptos"/>
               </a:rPr>
               <a:t>confidence &lt; .001  ·  variability &lt; .001</a:t>
-            </a:r>
-          </a:p>
-        </p:txBody>
-      </p:sp>
-      <p:sp>
-        <p:nvSpPr>
-          <p:cNvPr id="31" name="Rectangle 30"/>
-          <p:cNvSpPr/>
-          <p:nvPr/>
-        </p:nvSpPr>
-        <p:spPr>
-          <a:xfrm>
-            <a:off x="658368" y="6016752"/>
-            <a:ext cx="10835640" cy="274320"/>
-          </a:xfrm>
-          <a:prstGeom prst="rect">
-            <a:avLst/>
-          </a:prstGeom>
-          <a:solidFill>
-            <a:srgbClr val="F7F5F0"/>
-          </a:solidFill>
-          <a:ln>
-            <a:solidFill>
-              <a:srgbClr val="F7F5F0"/>
-            </a:solidFill>
-          </a:ln>
-        </p:spPr>
-        <p:style>
-          <a:lnRef idx="1">
-            <a:schemeClr val="accent1"/>
-          </a:lnRef>
-          <a:fillRef idx="3">
-            <a:schemeClr val="accent1"/>
-          </a:fillRef>
-          <a:effectRef idx="2">
-            <a:schemeClr val="accent1"/>
-          </a:effectRef>
-          <a:fontRef idx="minor">
-            <a:schemeClr val="lt1"/>
-          </a:fontRef>
-        </p:style>
-        <p:txBody>
-          <a:bodyPr lIns="36576" tIns="36576" rIns="36576" bIns="36576" rtlCol="0" anchor="t"/>
-          <a:lstStyle/>
-          <a:p>
-            <a:pPr algn="ctr"/>
-            <a:r>
-              <a:rPr sz="1600" b="1" i="0">
-                <a:solidFill>
-                  <a:srgbClr val="202A35"/>
-                </a:solidFill>
-                <a:latin typeface="Aptos"/>
-              </a:rPr>
-              <a:t>Ambiguous ≠ mislabeled. Hard-to-learn ≠ automatically wrong.</a:t>
             </a:r>
           </a:p>
         </p:txBody>
